--- a/assets/pptx/catalog-754.pptx
+++ b/assets/pptx/catalog-754.pptx
@@ -3301,7 +3301,7 @@
                 <a:ea typeface="Ebrima"/>
                 <a:cs typeface="Ebrima"/>
               </a:rPr>
-              <a:t>ዘመድ አግኝቻለሁ የሚወደኝ (2x)</a:t>
+              <a:t>ዘመድ አግኝቻለሁ የሚወደኝ 2x</a:t>
             </a:r>
           </a:p>
         </p:txBody>
@@ -3543,7 +3543,7 @@
                 <a:ea typeface="Ebrima"/>
                 <a:cs typeface="Ebrima"/>
               </a:rPr>
-              <a:t>ዘመድ አግኝቻለሁ የሚወደኝ (2x)</a:t>
+              <a:t>ዘመድ አግኝቻለሁ የሚወደኝ 2x</a:t>
             </a:r>
           </a:p>
         </p:txBody>
@@ -3785,7 +3785,7 @@
                 <a:ea typeface="Ebrima"/>
                 <a:cs typeface="Ebrima"/>
               </a:rPr>
-              <a:t>ዘመድ አግኝቻለሁ የሚወደኝ (2x)</a:t>
+              <a:t>ዘመድ አግኝቻለሁ የሚወደኝ 2x</a:t>
             </a:r>
           </a:p>
         </p:txBody>
@@ -4027,7 +4027,7 @@
                 <a:ea typeface="Ebrima"/>
                 <a:cs typeface="Ebrima"/>
               </a:rPr>
-              <a:t>ዘመድ አግኝቻለሁ የሚወደኝ (2x)</a:t>
+              <a:t>ዘመድ አግኝቻለሁ የሚወደኝ 2x</a:t>
             </a:r>
           </a:p>
         </p:txBody>
